--- a/project/praesentation/cuTile_Auto-Tuner_normalized.pptx
+++ b/project/praesentation/cuTile_Auto-Tuner_normalized.pptx
@@ -178,7 +178,7 @@
     </p:spTree>
     <p:extLst>
       <p:ext uri="{BB962C8B-B14F-4D97-AF65-F5344CB8AC3E}">
-        <p14:creationId xmlns:p14="http://schemas.microsoft.com/office/powerpoint/2010/main" val="2941360349"/>
+        <p14:creationId xmlns:p14="http://schemas.microsoft.com/office/powerpoint/2010/main" val="824155112"/>
       </p:ext>
     </p:extLst>
   </p:cSld>
@@ -883,7 +883,7 @@
           <a:lstStyle/>
           <a:p>
             <a:r>
-              <a:t>Gemessen wird pro Shape: getunter Kernel, Default (naive 8x8), torch.einsum (cuBLAS), bei A06 zusaetzlich der Handkernel (49.84). fp16 rein, fp32 Akku. Jede Config wird gegen torch.einsum geprueft (allclose rtol=1e-2/atol=1e-1). Ergebnis: 8x342 (A05) + 8x171 (A06), alle korrekt, 0 Fehlschlaege, inkl. der unteilbaren krumm-Shapes. GB10: 48 SMs, 25 MB L2, integriert.</a:t>
+              <a:t>Gemessen wird pro Shape: getunter Kernel, Default (naive 8x8), torch.einsum (cuBLAS), bei A06 zusaetzlich der Handkernel (46.5). fp16 rein, fp32 Akku. Jede Config wird gegen torch.einsum geprueft (allclose rtol=1e-2/atol=1e-1). Ergebnis: 8x342 (A05) + 8x171 (A06), alle korrekt, 0 Fehlschlaege, inkl. der unteilbaren krumm-Shapes. GB10: 48 SMs, 25 MB L2, integriert.</a:t>
             </a:r>
           </a:p>
         </p:txBody>
@@ -1163,7 +1163,7 @@
           <a:lstStyle/>
           <a:p>
             <a:r>
-              <a:t>Referenz-Shape: Tuner ~60 gegen Handkernel 49.84 (+24 %), gegen die mismatchte 8x8-Default 26.3 (2.29x — aber das ist die falsche Messlatte), gleichauf mit frischem torch 60.2. Der Gewinn kommt aus k_prim=32: der Handkernel nahm p=64 als einen mma-Tile, der Tuner teilt in zwei 32er-Kacheln. Ueber alle 8 Ring-Shapes 1.10-2.47x ueber Default, alle 171 Configs je Shape korrekt inkl. Padding. Vierter Balken (Bench Best = bestes von 171): schlaegt torch dort, wo dessen Ring-Pfad schlecht ist (square, tall, wide, large_k), verliert wo torch einen guten Pfad findet (small_k, krumm, batch). Anders als bei A05 (wo cuBLAS immer gewinnt) ist die Ring-Familie also der Fall, in dem sich der eigene Kernel lohnt.</a:t>
+              <a:t>Referenz-Shape: Tuner ~60 gegen Handkernel 46.5 (+29 %), gegen die mismatchte 8x8-Default 26.3 (2.29x — aber das ist die falsche Messlatte), gleichauf mit frischem torch 60.2. Der Gewinn kommt aus k_prim=32: der Handkernel nahm p=64 als einen mma-Tile, der Tuner teilt in zwei 32er-Kacheln. Der Handkernel-Balken ist das feste Referenz-Tiling (2x3) auf jede Shape gelegt -- es passt nur auf der Referenz gut, liegt bei 5/8 Shapes sogar unter dem 8x8-Default, waehrend der Tuner in allen 8 Regimen davor liegt. Ueber alle 8 Ring-Shapes 1.10-2.47x ueber Default, alle 171 Configs je Shape korrekt inkl. Padding. Vierter Balken (Bench Best = bestes von 171): schlaegt torch dort, wo dessen Ring-Pfad schlecht ist (square, tall, wide, large_k), verliert wo torch einen guten Pfad findet (small_k, krumm, batch). Anders als bei A05 (wo cuBLAS immer gewinnt) ist die Ring-Familie also der Fall, in dem sich der eigene Kernel lohnt.</a:t>
             </a:r>
           </a:p>
         </p:txBody>
@@ -2417,7 +2417,7 @@
           <a:p>
             <a:fld id="{5BCAD085-E8A6-8845-BD4E-CB4CCA059FC4}" type="datetimeFigureOut">
               <a:rPr lang="en-US" smtClean="0"/>
-              <a:t>7/7/26</a:t>
+              <a:t>7/8/26</a:t>
             </a:fld>
             <a:endParaRPr lang="en-US"/>
           </a:p>
@@ -2585,7 +2585,7 @@
           <a:p>
             <a:fld id="{5BCAD085-E8A6-8845-BD4E-CB4CCA059FC4}" type="datetimeFigureOut">
               <a:rPr lang="en-US" smtClean="0"/>
-              <a:t>7/7/26</a:t>
+              <a:t>7/8/26</a:t>
             </a:fld>
             <a:endParaRPr lang="en-US"/>
           </a:p>
@@ -2763,7 +2763,7 @@
           <a:p>
             <a:fld id="{5BCAD085-E8A6-8845-BD4E-CB4CCA059FC4}" type="datetimeFigureOut">
               <a:rPr lang="en-US" smtClean="0"/>
-              <a:t>7/7/26</a:t>
+              <a:t>7/8/26</a:t>
             </a:fld>
             <a:endParaRPr lang="en-US"/>
           </a:p>
@@ -2931,7 +2931,7 @@
           <a:p>
             <a:fld id="{5BCAD085-E8A6-8845-BD4E-CB4CCA059FC4}" type="datetimeFigureOut">
               <a:rPr lang="en-US" smtClean="0"/>
-              <a:t>7/7/26</a:t>
+              <a:t>7/8/26</a:t>
             </a:fld>
             <a:endParaRPr lang="en-US"/>
           </a:p>
@@ -3176,7 +3176,7 @@
           <a:p>
             <a:fld id="{5BCAD085-E8A6-8845-BD4E-CB4CCA059FC4}" type="datetimeFigureOut">
               <a:rPr lang="en-US" smtClean="0"/>
-              <a:t>7/7/26</a:t>
+              <a:t>7/8/26</a:t>
             </a:fld>
             <a:endParaRPr lang="en-US"/>
           </a:p>
@@ -3461,7 +3461,7 @@
           <a:p>
             <a:fld id="{5BCAD085-E8A6-8845-BD4E-CB4CCA059FC4}" type="datetimeFigureOut">
               <a:rPr lang="en-US" smtClean="0"/>
-              <a:t>7/7/26</a:t>
+              <a:t>7/8/26</a:t>
             </a:fld>
             <a:endParaRPr lang="en-US"/>
           </a:p>
@@ -3880,7 +3880,7 @@
           <a:p>
             <a:fld id="{5BCAD085-E8A6-8845-BD4E-CB4CCA059FC4}" type="datetimeFigureOut">
               <a:rPr lang="en-US" smtClean="0"/>
-              <a:t>7/7/26</a:t>
+              <a:t>7/8/26</a:t>
             </a:fld>
             <a:endParaRPr lang="en-US"/>
           </a:p>
@@ -3997,7 +3997,7 @@
           <a:p>
             <a:fld id="{5BCAD085-E8A6-8845-BD4E-CB4CCA059FC4}" type="datetimeFigureOut">
               <a:rPr lang="en-US" smtClean="0"/>
-              <a:t>7/7/26</a:t>
+              <a:t>7/8/26</a:t>
             </a:fld>
             <a:endParaRPr lang="en-US"/>
           </a:p>
@@ -4092,7 +4092,7 @@
           <a:p>
             <a:fld id="{5BCAD085-E8A6-8845-BD4E-CB4CCA059FC4}" type="datetimeFigureOut">
               <a:rPr lang="en-US" smtClean="0"/>
-              <a:t>7/7/26</a:t>
+              <a:t>7/8/26</a:t>
             </a:fld>
             <a:endParaRPr lang="en-US"/>
           </a:p>
@@ -4367,7 +4367,7 @@
           <a:p>
             <a:fld id="{5BCAD085-E8A6-8845-BD4E-CB4CCA059FC4}" type="datetimeFigureOut">
               <a:rPr lang="en-US" smtClean="0"/>
-              <a:t>7/7/26</a:t>
+              <a:t>7/8/26</a:t>
             </a:fld>
             <a:endParaRPr lang="en-US"/>
           </a:p>
@@ -4619,7 +4619,7 @@
           <a:p>
             <a:fld id="{5BCAD085-E8A6-8845-BD4E-CB4CCA059FC4}" type="datetimeFigureOut">
               <a:rPr lang="en-US" smtClean="0"/>
-              <a:t>7/7/26</a:t>
+              <a:t>7/8/26</a:t>
             </a:fld>
             <a:endParaRPr lang="en-US"/>
           </a:p>
@@ -4830,7 +4830,7 @@
           <a:p>
             <a:fld id="{5BCAD085-E8A6-8845-BD4E-CB4CCA059FC4}" type="datetimeFigureOut">
               <a:rPr lang="en-US" smtClean="0"/>
-              <a:t>7/7/26</a:t>
+              <a:t>7/8/26</a:t>
             </a:fld>
             <a:endParaRPr lang="en-US"/>
           </a:p>
@@ -5394,7 +5394,7 @@
         <p:spPr>
           <a:xfrm>
             <a:off x="822960" y="4389120"/>
-            <a:ext cx="10515600" cy="346249"/>
+            <a:ext cx="10515600" cy="731520"/>
           </a:xfrm>
           <a:prstGeom prst="rect">
             <a:avLst/>
@@ -5409,119 +5409,14 @@
           <a:p>
             <a:pPr algn="l"/>
             <a:r>
-              <a:rPr sz="1650" b="0" i="0" dirty="0">
+              <a:rPr sz="1650" b="0" i="0">
                 <a:solidFill>
                   <a:srgbClr val="C3D4EA"/>
                 </a:solidFill>
                 <a:latin typeface="Calibri"/>
               </a:rPr>
-              <a:t>Aus </a:t>
-            </a:r>
-            <a:r>
-              <a:rPr sz="1650" b="0" i="0" dirty="0" err="1">
-                <a:solidFill>
-                  <a:srgbClr val="C3D4EA"/>
-                </a:solidFill>
-                <a:latin typeface="Calibri"/>
-              </a:rPr>
-              <a:t>Einsum</a:t>
-            </a:r>
-            <a:r>
-              <a:rPr sz="1650" b="0" i="0" dirty="0">
-                <a:solidFill>
-                  <a:srgbClr val="C3D4EA"/>
-                </a:solidFill>
-                <a:latin typeface="Calibri"/>
-              </a:rPr>
-              <a:t>-String + Shapes </a:t>
-            </a:r>
-            <a:r>
-              <a:rPr sz="1650" b="0" i="0" dirty="0" err="1">
-                <a:solidFill>
-                  <a:srgbClr val="C3D4EA"/>
-                </a:solidFill>
-                <a:latin typeface="Calibri"/>
-              </a:rPr>
-              <a:t>automatisch</a:t>
-            </a:r>
-            <a:r>
-              <a:rPr sz="1650" b="0" i="0" dirty="0">
-                <a:solidFill>
-                  <a:srgbClr val="C3D4EA"/>
-                </a:solidFill>
-                <a:latin typeface="Calibri"/>
-              </a:rPr>
-              <a:t> </a:t>
-            </a:r>
-            <a:r>
-              <a:rPr sz="1650" b="0" i="0" dirty="0" err="1">
-                <a:solidFill>
-                  <a:srgbClr val="C3D4EA"/>
-                </a:solidFill>
-                <a:latin typeface="Calibri"/>
-              </a:rPr>
-              <a:t>eine</a:t>
-            </a:r>
-            <a:r>
-              <a:rPr sz="1650" b="0" i="0" dirty="0">
-                <a:solidFill>
-                  <a:srgbClr val="C3D4EA"/>
-                </a:solidFill>
-                <a:latin typeface="Calibri"/>
-              </a:rPr>
-              <a:t> </a:t>
-            </a:r>
-            <a:r>
-              <a:rPr sz="1650" b="0" i="0" dirty="0" err="1">
-                <a:solidFill>
-                  <a:srgbClr val="C3D4EA"/>
-                </a:solidFill>
-                <a:latin typeface="Calibri"/>
-              </a:rPr>
-              <a:t>gute</a:t>
-            </a:r>
-            <a:r>
-              <a:rPr sz="1650" b="0" i="0" dirty="0">
-                <a:solidFill>
-                  <a:srgbClr val="C3D4EA"/>
-                </a:solidFill>
-                <a:latin typeface="Calibri"/>
-              </a:rPr>
-              <a:t> </a:t>
-            </a:r>
-            <a:r>
-              <a:rPr sz="1650" b="0" i="0" dirty="0" err="1">
-                <a:solidFill>
-                  <a:srgbClr val="C3D4EA"/>
-                </a:solidFill>
-                <a:latin typeface="Calibri"/>
-              </a:rPr>
-              <a:t>cuTile</a:t>
-            </a:r>
-            <a:r>
-              <a:rPr sz="1650" b="0" i="0" dirty="0">
-                <a:solidFill>
-                  <a:srgbClr val="C3D4EA"/>
-                </a:solidFill>
-                <a:latin typeface="Calibri"/>
-              </a:rPr>
-              <a:t>-Tiling-Config </a:t>
-            </a:r>
-            <a:r>
-              <a:rPr sz="1650" b="0" i="0" dirty="0" err="1">
-                <a:solidFill>
-                  <a:srgbClr val="C3D4EA"/>
-                </a:solidFill>
-                <a:latin typeface="Calibri"/>
-              </a:rPr>
-              <a:t>finden</a:t>
-            </a:r>
-            <a:endParaRPr sz="1650" b="0" i="0" dirty="0">
-              <a:solidFill>
-                <a:srgbClr val="C3D4EA"/>
-              </a:solidFill>
-              <a:latin typeface="Calibri"/>
-            </a:endParaRPr>
+              <a:t>Aus Einsum-String + Shapes automatisch eine gute cuTile-Tiling-Config finden — gemessen, nicht geraten.</a:t>
+            </a:r>
           </a:p>
         </p:txBody>
       </p:sp>
@@ -10816,8 +10711,8 @@
         </p:blipFill>
         <p:spPr>
           <a:xfrm>
-            <a:off x="1273568" y="1554480"/>
-            <a:ext cx="6779743" cy="4114800"/>
+            <a:off x="1251360" y="1554480"/>
+            <a:ext cx="6824159" cy="4114800"/>
           </a:xfrm>
           <a:prstGeom prst="rect">
             <a:avLst/>
@@ -12311,8 +12206,8 @@
         </p:blipFill>
         <p:spPr>
           <a:xfrm>
-            <a:off x="636099" y="1572768"/>
-            <a:ext cx="6774520" cy="4114800"/>
+            <a:off x="536241" y="1572768"/>
+            <a:ext cx="6974237" cy="4114800"/>
           </a:xfrm>
           <a:prstGeom prst="rect">
             <a:avLst/>
@@ -12418,7 +12313,7 @@
                 </a:solidFill>
                 <a:latin typeface="Calibri"/>
               </a:rPr>
-              <a:t>Anders als GEMM: unsere Bench-Best schlägt torch, wo dessen Ring-Pfad schlecht ist (tall, large_k); der Tuner schlägt zudem den Handkernel (+24 %, aus k_prim=32).</a:t>
+              <a:t>Anders als GEMM: unsere Bench-Best schlägt torch, wo dessen Ring-Pfad schlecht ist (tall, large_k); der Tuner schlägt zudem den Handkernel (+29 %, aus k_prim=32).</a:t>
             </a:r>
           </a:p>
         </p:txBody>
@@ -15022,6 +14917,141 @@
       </p:sp>
       <p:sp>
         <p:nvSpPr>
+          <p:cNvPr id="10" name="TextBox 9"/>
+          <p:cNvSpPr txBox="1"/>
+          <p:nvPr/>
+        </p:nvSpPr>
+        <p:spPr>
+          <a:xfrm>
+            <a:off x="7589520" y="1828800"/>
+            <a:ext cx="4160520" cy="3840480"/>
+          </a:xfrm>
+          <a:prstGeom prst="rect">
+            <a:avLst/>
+          </a:prstGeom>
+          <a:noFill/>
+        </p:spPr>
+        <p:txBody>
+          <a:bodyPr wrap="square">
+            <a:spAutoFit/>
+          </a:bodyPr>
+          <a:lstStyle/>
+          <a:p>
+            <a:pPr>
+              <a:lnSpc>
+                <a:spcPct val="110000"/>
+              </a:lnSpc>
+              <a:spcAft>
+                <a:spcPts val="1000"/>
+              </a:spcAft>
+            </a:pPr>
+            <a:r>
+              <a:rPr sz="1400" b="1" i="0">
+                <a:solidFill>
+                  <a:srgbClr val="2A78D6"/>
+                </a:solidFill>
+                <a:latin typeface="Calibri"/>
+              </a:rPr>
+              <a:t>▸  </a:t>
+            </a:r>
+            <a:r>
+              <a:rPr sz="1400" b="0" i="0">
+                <a:solidFill>
+                  <a:srgbClr val="3F3E3A"/>
+                </a:solidFill>
+                <a:latin typeface="Calibri"/>
+              </a:rPr>
+              <a:t>Full-HD-Plasma (2 MPixel) = ein großes GEMM: Y · X.</a:t>
+            </a:r>
+          </a:p>
+          <a:p>
+            <a:pPr>
+              <a:lnSpc>
+                <a:spcPct val="110000"/>
+              </a:lnSpc>
+              <a:spcAft>
+                <a:spcPts val="1000"/>
+              </a:spcAft>
+            </a:pPr>
+            <a:r>
+              <a:rPr sz="1400" b="1" i="0">
+                <a:solidFill>
+                  <a:srgbClr val="2A78D6"/>
+                </a:solidFill>
+                <a:latin typeface="Calibri"/>
+              </a:rPr>
+              <a:t>▸  </a:t>
+            </a:r>
+            <a:r>
+              <a:rPr sz="1400" b="0" i="0">
+                <a:solidFill>
+                  <a:srgbClr val="3F3E3A"/>
+                </a:solidFill>
+                <a:latin typeface="Calibri"/>
+              </a:rPr>
+              <a:t>8×8-Default vs. Tuner-Config — gleiche Mathe.</a:t>
+            </a:r>
+          </a:p>
+          <a:p>
+            <a:pPr>
+              <a:lnSpc>
+                <a:spcPct val="110000"/>
+              </a:lnSpc>
+              <a:spcAft>
+                <a:spcPts val="1000"/>
+              </a:spcAft>
+            </a:pPr>
+            <a:r>
+              <a:rPr sz="1400" b="1" i="0">
+                <a:solidFill>
+                  <a:srgbClr val="2A78D6"/>
+                </a:solidFill>
+                <a:latin typeface="Calibri"/>
+              </a:rPr>
+              <a:t>▸  </a:t>
+            </a:r>
+            <a:r>
+              <a:rPr sz="1400" b="0" i="0">
+                <a:solidFill>
+                  <a:srgbClr val="3F3E3A"/>
+                </a:solidFill>
+                <a:latin typeface="Calibri"/>
+              </a:rPr>
+              <a:t>Gleiches Bild, beide gegen torch geprüft.</a:t>
+            </a:r>
+          </a:p>
+          <a:p>
+            <a:pPr>
+              <a:lnSpc>
+                <a:spcPct val="110000"/>
+              </a:lnSpc>
+              <a:spcAft>
+                <a:spcPts val="1000"/>
+              </a:spcAft>
+            </a:pPr>
+            <a:r>
+              <a:rPr sz="1400" b="1" i="0">
+                <a:solidFill>
+                  <a:srgbClr val="2A78D6"/>
+                </a:solidFill>
+                <a:latin typeface="Calibri"/>
+              </a:rPr>
+              <a:t>▸  </a:t>
+            </a:r>
+            <a:r>
+              <a:rPr sz="1400" b="0" i="0">
+                <a:solidFill>
+                  <a:srgbClr val="3F3E3A"/>
+                </a:solidFill>
+                <a:latin typeface="Calibri"/>
+              </a:rPr>
+              <a:t>Krumme Shape → Default padded schlecht → Tuner gewinnt.</a:t>
+            </a:r>
+          </a:p>
+        </p:txBody>
+      </p:sp>
+      <p:sp>
+        <p:nvSpPr>
           <p:cNvPr id="11" name="Rounded Rectangle 10"/>
           <p:cNvSpPr/>
           <p:nvPr/>
@@ -15996,7 +16026,7 @@
                 </a:solidFill>
                 <a:latin typeface="Calibri"/>
               </a:rPr>
-              <a:t>sauberer Transfer, ein zusätzlicher Kernel-Typ, schlägt den Handkernel (+24 %).</a:t>
+              <a:t>sauberer Transfer, ein zusätzlicher Kernel-Typ, schlägt den Handkernel (+29 %).</a:t>
             </a:r>
           </a:p>
           <a:p>
